--- a/tmp-recueil/recueil.pptx
+++ b/tmp-recueil/recueil.pptx
@@ -5592,9 +5592,55 @@
           </a:p>
         </p:txBody>
       </p:sp>
+      <p:sp>
+        <p:nvSpPr>
+          <p:cNvPr id="11" name="Rounded Rectangle 10"/>
+          <p:cNvSpPr/>
+          <p:nvPr/>
+        </p:nvSpPr>
+        <p:spPr>
+          <a:xfrm>
+            <a:off x="9174175" y="457200"/>
+            <a:ext cx="2468880" cy="1143000"/>
+          </a:xfrm>
+          <a:prstGeom prst="roundRect">
+            <a:avLst>
+              <a:gd name="adj" fmla="val 12000"/>
+            </a:avLst>
+          </a:prstGeom>
+          <a:solidFill>
+            <a:srgbClr val="FFFFFF"/>
+          </a:solidFill>
+          <a:ln>
+            <a:noFill/>
+          </a:ln>
+          <a:effectLst/>
+        </p:spPr>
+        <p:style>
+          <a:lnRef idx="1">
+            <a:schemeClr val="accent1"/>
+          </a:lnRef>
+          <a:fillRef idx="3">
+            <a:schemeClr val="accent1"/>
+          </a:fillRef>
+          <a:effectRef idx="2">
+            <a:schemeClr val="accent1"/>
+          </a:effectRef>
+          <a:fontRef idx="minor">
+            <a:schemeClr val="lt1"/>
+          </a:fontRef>
+        </p:style>
+        <p:txBody>
+          <a:bodyPr rtlCol="0" anchor="ctr"/>
+          <a:lstStyle/>
+          <a:p>
+            <a:pPr algn="ctr"/>
+          </a:p>
+        </p:txBody>
+      </p:sp>
       <p:pic>
         <p:nvPicPr>
-          <p:cNvPr id="11" name="Picture 10" descr="logow.png"/>
+          <p:cNvPr id="12" name="Picture 11" descr="logo.png"/>
           <p:cNvPicPr>
             <a:picLocks noChangeAspect="1"/>
           </p:cNvPicPr>
@@ -5608,8 +5654,8 @@
         </p:blipFill>
         <p:spPr>
           <a:xfrm>
-            <a:off x="9585655" y="5760720"/>
-            <a:ext cx="1883361" cy="731520"/>
+            <a:off x="9357055" y="566928"/>
+            <a:ext cx="2360722" cy="914400"/>
           </a:xfrm>
           <a:prstGeom prst="rect">
             <a:avLst/>
@@ -5618,7 +5664,7 @@
       </p:pic>
       <p:sp>
         <p:nvSpPr>
-          <p:cNvPr id="12" name="TextBox 11"/>
+          <p:cNvPr id="13" name="TextBox 12"/>
           <p:cNvSpPr txBox="1"/>
           <p:nvPr/>
         </p:nvSpPr>
@@ -5653,7 +5699,7 @@
       </p:sp>
       <p:sp>
         <p:nvSpPr>
-          <p:cNvPr id="13" name="TextBox 12"/>
+          <p:cNvPr id="14" name="TextBox 13"/>
           <p:cNvSpPr txBox="1"/>
           <p:nvPr/>
         </p:nvSpPr>
@@ -7183,9 +7229,55 @@
           </a:p>
         </p:txBody>
       </p:sp>
+      <p:sp>
+        <p:nvSpPr>
+          <p:cNvPr id="11" name="Rounded Rectangle 10"/>
+          <p:cNvSpPr/>
+          <p:nvPr/>
+        </p:nvSpPr>
+        <p:spPr>
+          <a:xfrm>
+            <a:off x="9174175" y="457200"/>
+            <a:ext cx="2468880" cy="1143000"/>
+          </a:xfrm>
+          <a:prstGeom prst="roundRect">
+            <a:avLst>
+              <a:gd name="adj" fmla="val 12000"/>
+            </a:avLst>
+          </a:prstGeom>
+          <a:solidFill>
+            <a:srgbClr val="FFFFFF"/>
+          </a:solidFill>
+          <a:ln>
+            <a:noFill/>
+          </a:ln>
+          <a:effectLst/>
+        </p:spPr>
+        <p:style>
+          <a:lnRef idx="1">
+            <a:schemeClr val="accent1"/>
+          </a:lnRef>
+          <a:fillRef idx="3">
+            <a:schemeClr val="accent1"/>
+          </a:fillRef>
+          <a:effectRef idx="2">
+            <a:schemeClr val="accent1"/>
+          </a:effectRef>
+          <a:fontRef idx="minor">
+            <a:schemeClr val="lt1"/>
+          </a:fontRef>
+        </p:style>
+        <p:txBody>
+          <a:bodyPr rtlCol="0" anchor="ctr"/>
+          <a:lstStyle/>
+          <a:p>
+            <a:pPr algn="ctr"/>
+          </a:p>
+        </p:txBody>
+      </p:sp>
       <p:pic>
         <p:nvPicPr>
-          <p:cNvPr id="11" name="Picture 10" descr="logow.png"/>
+          <p:cNvPr id="12" name="Picture 11" descr="logo.png"/>
           <p:cNvPicPr>
             <a:picLocks noChangeAspect="1"/>
           </p:cNvPicPr>
@@ -7199,8 +7291,8 @@
         </p:blipFill>
         <p:spPr>
           <a:xfrm>
-            <a:off x="9585655" y="5760720"/>
-            <a:ext cx="1883361" cy="731520"/>
+            <a:off x="9357055" y="566928"/>
+            <a:ext cx="2360722" cy="914400"/>
           </a:xfrm>
           <a:prstGeom prst="rect">
             <a:avLst/>
@@ -7209,7 +7301,7 @@
       </p:pic>
       <p:sp>
         <p:nvSpPr>
-          <p:cNvPr id="12" name="TextBox 11"/>
+          <p:cNvPr id="13" name="TextBox 12"/>
           <p:cNvSpPr txBox="1"/>
           <p:nvPr/>
         </p:nvSpPr>
@@ -7244,7 +7336,7 @@
       </p:sp>
       <p:sp>
         <p:nvSpPr>
-          <p:cNvPr id="13" name="TextBox 12"/>
+          <p:cNvPr id="14" name="TextBox 13"/>
           <p:cNvSpPr txBox="1"/>
           <p:nvPr/>
         </p:nvSpPr>
@@ -7799,7 +7891,7 @@
             <a:r>
               <a:rPr sz="1200" b="1">
                 <a:solidFill>
-                  <a:srgbClr val="159641"/>
+                  <a:srgbClr val="E84E0E"/>
                 </a:solidFill>
                 <a:latin typeface="Open Sans"/>
                 <a:hlinkClick r:id="rId5"/>
@@ -7975,7 +8067,7 @@
             <a:r>
               <a:rPr sz="1200" b="1">
                 <a:solidFill>
-                  <a:srgbClr val="159641"/>
+                  <a:srgbClr val="E84E0E"/>
                 </a:solidFill>
                 <a:latin typeface="Open Sans"/>
                 <a:hlinkClick r:id="rId7"/>
@@ -8151,7 +8243,7 @@
             <a:r>
               <a:rPr sz="1200" b="1">
                 <a:solidFill>
-                  <a:srgbClr val="159641"/>
+                  <a:srgbClr val="E84E0E"/>
                 </a:solidFill>
                 <a:latin typeface="Open Sans"/>
                 <a:hlinkClick r:id="rId9"/>
@@ -8327,7 +8419,7 @@
             <a:r>
               <a:rPr sz="1200" b="1">
                 <a:solidFill>
-                  <a:srgbClr val="159641"/>
+                  <a:srgbClr val="E84E0E"/>
                 </a:solidFill>
                 <a:latin typeface="Open Sans"/>
                 <a:hlinkClick r:id="rId11"/>
@@ -8929,7 +9021,7 @@
             <a:r>
               <a:rPr sz="1200" b="1">
                 <a:solidFill>
-                  <a:srgbClr val="159641"/>
+                  <a:srgbClr val="E84E0E"/>
                 </a:solidFill>
                 <a:latin typeface="Open Sans"/>
                 <a:hlinkClick r:id="rId5"/>
@@ -9105,7 +9197,7 @@
             <a:r>
               <a:rPr sz="1200" b="1">
                 <a:solidFill>
-                  <a:srgbClr val="159641"/>
+                  <a:srgbClr val="E84E0E"/>
                 </a:solidFill>
                 <a:latin typeface="Open Sans"/>
                 <a:hlinkClick r:id="rId7"/>
@@ -9281,7 +9373,7 @@
             <a:r>
               <a:rPr sz="1200" b="1">
                 <a:solidFill>
-                  <a:srgbClr val="159641"/>
+                  <a:srgbClr val="E84E0E"/>
                 </a:solidFill>
                 <a:latin typeface="Open Sans"/>
                 <a:hlinkClick r:id="rId9"/>
@@ -9457,7 +9549,7 @@
             <a:r>
               <a:rPr sz="1200" b="1">
                 <a:solidFill>
-                  <a:srgbClr val="159641"/>
+                  <a:srgbClr val="E84E0E"/>
                 </a:solidFill>
                 <a:latin typeface="Open Sans"/>
                 <a:hlinkClick r:id="rId11"/>
@@ -9904,9 +9996,55 @@
           </a:p>
         </p:txBody>
       </p:sp>
+      <p:sp>
+        <p:nvSpPr>
+          <p:cNvPr id="11" name="Rounded Rectangle 10"/>
+          <p:cNvSpPr/>
+          <p:nvPr/>
+        </p:nvSpPr>
+        <p:spPr>
+          <a:xfrm>
+            <a:off x="9174175" y="457200"/>
+            <a:ext cx="2468880" cy="1143000"/>
+          </a:xfrm>
+          <a:prstGeom prst="roundRect">
+            <a:avLst>
+              <a:gd name="adj" fmla="val 12000"/>
+            </a:avLst>
+          </a:prstGeom>
+          <a:solidFill>
+            <a:srgbClr val="FFFFFF"/>
+          </a:solidFill>
+          <a:ln>
+            <a:noFill/>
+          </a:ln>
+          <a:effectLst/>
+        </p:spPr>
+        <p:style>
+          <a:lnRef idx="1">
+            <a:schemeClr val="accent1"/>
+          </a:lnRef>
+          <a:fillRef idx="3">
+            <a:schemeClr val="accent1"/>
+          </a:fillRef>
+          <a:effectRef idx="2">
+            <a:schemeClr val="accent1"/>
+          </a:effectRef>
+          <a:fontRef idx="minor">
+            <a:schemeClr val="lt1"/>
+          </a:fontRef>
+        </p:style>
+        <p:txBody>
+          <a:bodyPr rtlCol="0" anchor="ctr"/>
+          <a:lstStyle/>
+          <a:p>
+            <a:pPr algn="ctr"/>
+          </a:p>
+        </p:txBody>
+      </p:sp>
       <p:pic>
         <p:nvPicPr>
-          <p:cNvPr id="11" name="Picture 10" descr="logow.png"/>
+          <p:cNvPr id="12" name="Picture 11" descr="logo.png"/>
           <p:cNvPicPr>
             <a:picLocks noChangeAspect="1"/>
           </p:cNvPicPr>
@@ -9920,8 +10058,8 @@
         </p:blipFill>
         <p:spPr>
           <a:xfrm>
-            <a:off x="9585655" y="5760720"/>
-            <a:ext cx="1883361" cy="731520"/>
+            <a:off x="9357055" y="566928"/>
+            <a:ext cx="2360722" cy="914400"/>
           </a:xfrm>
           <a:prstGeom prst="rect">
             <a:avLst/>
@@ -9930,7 +10068,7 @@
       </p:pic>
       <p:sp>
         <p:nvSpPr>
-          <p:cNvPr id="12" name="TextBox 11"/>
+          <p:cNvPr id="13" name="TextBox 12"/>
           <p:cNvSpPr txBox="1"/>
           <p:nvPr/>
         </p:nvSpPr>
@@ -9965,7 +10103,7 @@
       </p:sp>
       <p:sp>
         <p:nvSpPr>
-          <p:cNvPr id="13" name="TextBox 12"/>
+          <p:cNvPr id="14" name="TextBox 13"/>
           <p:cNvSpPr txBox="1"/>
           <p:nvPr/>
         </p:nvSpPr>
@@ -12615,7 +12753,7 @@
         <p:spPr>
           <a:xfrm>
             <a:off x="731520" y="5120640"/>
-            <a:ext cx="10515600" cy="457200"/>
+            <a:ext cx="10515600" cy="731520"/>
           </a:xfrm>
           <a:prstGeom prst="rect">
             <a:avLst/>
@@ -13431,7 +13569,7 @@
             <a:r>
               <a:rPr sz="1400" b="1">
                 <a:solidFill>
-                  <a:srgbClr val="159641"/>
+                  <a:srgbClr val="E84E0E"/>
                 </a:solidFill>
                 <a:latin typeface="Open Sans"/>
               </a:rPr>
@@ -14319,7 +14457,7 @@
             <a:r>
               <a:rPr sz="1400" b="1">
                 <a:solidFill>
-                  <a:srgbClr val="159641"/>
+                  <a:srgbClr val="E84E0E"/>
                 </a:solidFill>
                 <a:latin typeface="Open Sans"/>
               </a:rPr>
@@ -15026,9 +15164,55 @@
           </a:p>
         </p:txBody>
       </p:sp>
+      <p:sp>
+        <p:nvSpPr>
+          <p:cNvPr id="11" name="Rounded Rectangle 10"/>
+          <p:cNvSpPr/>
+          <p:nvPr/>
+        </p:nvSpPr>
+        <p:spPr>
+          <a:xfrm>
+            <a:off x="9174175" y="457200"/>
+            <a:ext cx="2468880" cy="1143000"/>
+          </a:xfrm>
+          <a:prstGeom prst="roundRect">
+            <a:avLst>
+              <a:gd name="adj" fmla="val 12000"/>
+            </a:avLst>
+          </a:prstGeom>
+          <a:solidFill>
+            <a:srgbClr val="FFFFFF"/>
+          </a:solidFill>
+          <a:ln>
+            <a:noFill/>
+          </a:ln>
+          <a:effectLst/>
+        </p:spPr>
+        <p:style>
+          <a:lnRef idx="1">
+            <a:schemeClr val="accent1"/>
+          </a:lnRef>
+          <a:fillRef idx="3">
+            <a:schemeClr val="accent1"/>
+          </a:fillRef>
+          <a:effectRef idx="2">
+            <a:schemeClr val="accent1"/>
+          </a:effectRef>
+          <a:fontRef idx="minor">
+            <a:schemeClr val="lt1"/>
+          </a:fontRef>
+        </p:style>
+        <p:txBody>
+          <a:bodyPr rtlCol="0" anchor="ctr"/>
+          <a:lstStyle/>
+          <a:p>
+            <a:pPr algn="ctr"/>
+          </a:p>
+        </p:txBody>
+      </p:sp>
       <p:pic>
         <p:nvPicPr>
-          <p:cNvPr id="11" name="Picture 10" descr="logow.png"/>
+          <p:cNvPr id="12" name="Picture 11" descr="logo.png"/>
           <p:cNvPicPr>
             <a:picLocks noChangeAspect="1"/>
           </p:cNvPicPr>
@@ -15042,8 +15226,8 @@
         </p:blipFill>
         <p:spPr>
           <a:xfrm>
-            <a:off x="9585655" y="5760720"/>
-            <a:ext cx="1883361" cy="731520"/>
+            <a:off x="9357055" y="566928"/>
+            <a:ext cx="2360722" cy="914400"/>
           </a:xfrm>
           <a:prstGeom prst="rect">
             <a:avLst/>
@@ -15052,7 +15236,7 @@
       </p:pic>
       <p:sp>
         <p:nvSpPr>
-          <p:cNvPr id="12" name="TextBox 11"/>
+          <p:cNvPr id="13" name="TextBox 12"/>
           <p:cNvSpPr txBox="1"/>
           <p:nvPr/>
         </p:nvSpPr>
@@ -15087,7 +15271,7 @@
       </p:sp>
       <p:sp>
         <p:nvSpPr>
-          <p:cNvPr id="13" name="TextBox 12"/>
+          <p:cNvPr id="14" name="TextBox 13"/>
           <p:cNvSpPr txBox="1"/>
           <p:nvPr/>
         </p:nvSpPr>
@@ -15642,7 +15826,7 @@
             <a:r>
               <a:rPr sz="1200" b="1">
                 <a:solidFill>
-                  <a:srgbClr val="159641"/>
+                  <a:srgbClr val="E84E0E"/>
                 </a:solidFill>
                 <a:latin typeface="Open Sans"/>
                 <a:hlinkClick r:id="rId5"/>
@@ -15818,7 +16002,7 @@
             <a:r>
               <a:rPr sz="1200" b="1">
                 <a:solidFill>
-                  <a:srgbClr val="159641"/>
+                  <a:srgbClr val="E84E0E"/>
                 </a:solidFill>
                 <a:latin typeface="Open Sans"/>
                 <a:hlinkClick r:id="rId7"/>
@@ -15994,7 +16178,7 @@
             <a:r>
               <a:rPr sz="1200" b="1">
                 <a:solidFill>
-                  <a:srgbClr val="159641"/>
+                  <a:srgbClr val="E84E0E"/>
                 </a:solidFill>
                 <a:latin typeface="Open Sans"/>
                 <a:hlinkClick r:id="rId9"/>
@@ -16170,7 +16354,7 @@
             <a:r>
               <a:rPr sz="1200" b="1">
                 <a:solidFill>
-                  <a:srgbClr val="159641"/>
+                  <a:srgbClr val="E84E0E"/>
                 </a:solidFill>
                 <a:latin typeface="Open Sans"/>
                 <a:hlinkClick r:id="rId11"/>
@@ -16772,7 +16956,7 @@
             <a:r>
               <a:rPr sz="1200" b="1">
                 <a:solidFill>
-                  <a:srgbClr val="159641"/>
+                  <a:srgbClr val="E84E0E"/>
                 </a:solidFill>
                 <a:latin typeface="Open Sans"/>
                 <a:hlinkClick r:id="rId5"/>
@@ -16948,7 +17132,7 @@
             <a:r>
               <a:rPr sz="1200" b="1">
                 <a:solidFill>
-                  <a:srgbClr val="159641"/>
+                  <a:srgbClr val="E84E0E"/>
                 </a:solidFill>
                 <a:latin typeface="Open Sans"/>
                 <a:hlinkClick r:id="rId7"/>
@@ -17124,7 +17308,7 @@
             <a:r>
               <a:rPr sz="1200" b="1">
                 <a:solidFill>
-                  <a:srgbClr val="159641"/>
+                  <a:srgbClr val="E84E0E"/>
                 </a:solidFill>
                 <a:latin typeface="Open Sans"/>
                 <a:hlinkClick r:id="rId9"/>
@@ -17300,7 +17484,7 @@
             <a:r>
               <a:rPr sz="1200" b="1">
                 <a:solidFill>
-                  <a:srgbClr val="159641"/>
+                  <a:srgbClr val="E84E0E"/>
                 </a:solidFill>
                 <a:latin typeface="Open Sans"/>
                 <a:hlinkClick r:id="rId11"/>
@@ -17902,7 +18086,7 @@
             <a:r>
               <a:rPr sz="1200" b="1">
                 <a:solidFill>
-                  <a:srgbClr val="159641"/>
+                  <a:srgbClr val="E84E0E"/>
                 </a:solidFill>
                 <a:latin typeface="Open Sans"/>
                 <a:hlinkClick r:id="rId5"/>
@@ -18078,7 +18262,7 @@
             <a:r>
               <a:rPr sz="1200" b="1">
                 <a:solidFill>
-                  <a:srgbClr val="159641"/>
+                  <a:srgbClr val="E84E0E"/>
                 </a:solidFill>
                 <a:latin typeface="Open Sans"/>
                 <a:hlinkClick r:id="rId7"/>
@@ -18254,7 +18438,7 @@
             <a:r>
               <a:rPr sz="1200" b="1">
                 <a:solidFill>
-                  <a:srgbClr val="159641"/>
+                  <a:srgbClr val="E84E0E"/>
                 </a:solidFill>
                 <a:latin typeface="Open Sans"/>
                 <a:hlinkClick r:id="rId9"/>
@@ -18430,7 +18614,7 @@
             <a:r>
               <a:rPr sz="1200" b="1">
                 <a:solidFill>
-                  <a:srgbClr val="159641"/>
+                  <a:srgbClr val="E84E0E"/>
                 </a:solidFill>
                 <a:latin typeface="Open Sans"/>
                 <a:hlinkClick r:id="rId11"/>
@@ -18877,9 +19061,55 @@
           </a:p>
         </p:txBody>
       </p:sp>
+      <p:sp>
+        <p:nvSpPr>
+          <p:cNvPr id="11" name="Rounded Rectangle 10"/>
+          <p:cNvSpPr/>
+          <p:nvPr/>
+        </p:nvSpPr>
+        <p:spPr>
+          <a:xfrm>
+            <a:off x="9174175" y="457200"/>
+            <a:ext cx="2468880" cy="1143000"/>
+          </a:xfrm>
+          <a:prstGeom prst="roundRect">
+            <a:avLst>
+              <a:gd name="adj" fmla="val 12000"/>
+            </a:avLst>
+          </a:prstGeom>
+          <a:solidFill>
+            <a:srgbClr val="FFFFFF"/>
+          </a:solidFill>
+          <a:ln>
+            <a:noFill/>
+          </a:ln>
+          <a:effectLst/>
+        </p:spPr>
+        <p:style>
+          <a:lnRef idx="1">
+            <a:schemeClr val="accent1"/>
+          </a:lnRef>
+          <a:fillRef idx="3">
+            <a:schemeClr val="accent1"/>
+          </a:fillRef>
+          <a:effectRef idx="2">
+            <a:schemeClr val="accent1"/>
+          </a:effectRef>
+          <a:fontRef idx="minor">
+            <a:schemeClr val="lt1"/>
+          </a:fontRef>
+        </p:style>
+        <p:txBody>
+          <a:bodyPr rtlCol="0" anchor="ctr"/>
+          <a:lstStyle/>
+          <a:p>
+            <a:pPr algn="ctr"/>
+          </a:p>
+        </p:txBody>
+      </p:sp>
       <p:pic>
         <p:nvPicPr>
-          <p:cNvPr id="11" name="Picture 10" descr="logow.png"/>
+          <p:cNvPr id="12" name="Picture 11" descr="logo.png"/>
           <p:cNvPicPr>
             <a:picLocks noChangeAspect="1"/>
           </p:cNvPicPr>
@@ -18893,8 +19123,8 @@
         </p:blipFill>
         <p:spPr>
           <a:xfrm>
-            <a:off x="9585655" y="5760720"/>
-            <a:ext cx="1883361" cy="731520"/>
+            <a:off x="9357055" y="566928"/>
+            <a:ext cx="2360722" cy="914400"/>
           </a:xfrm>
           <a:prstGeom prst="rect">
             <a:avLst/>
@@ -18903,7 +19133,7 @@
       </p:pic>
       <p:sp>
         <p:nvSpPr>
-          <p:cNvPr id="12" name="TextBox 11"/>
+          <p:cNvPr id="13" name="TextBox 12"/>
           <p:cNvSpPr txBox="1"/>
           <p:nvPr/>
         </p:nvSpPr>
@@ -18938,7 +19168,7 @@
       </p:sp>
       <p:sp>
         <p:nvSpPr>
-          <p:cNvPr id="13" name="TextBox 12"/>
+          <p:cNvPr id="14" name="TextBox 13"/>
           <p:cNvSpPr txBox="1"/>
           <p:nvPr/>
         </p:nvSpPr>
@@ -21274,10 +21504,10 @@
         <a:srgbClr val="F79646"/>
       </a:accent6>
       <a:hlink>
-        <a:srgbClr val="0000FF"/>
+        <a:srgbClr val="E84E0E"/>
       </a:hlink>
       <a:folHlink>
-        <a:srgbClr val="800080"/>
+        <a:srgbClr val="159641"/>
       </a:folHlink>
     </a:clrScheme>
     <a:fontScheme name="Office">

--- a/tmp-recueil/recueil.pptx
+++ b/tmp-recueil/recueil.pptx
@@ -5600,8 +5600,8 @@
         </p:nvSpPr>
         <p:spPr>
           <a:xfrm>
-            <a:off x="9174175" y="457200"/>
-            <a:ext cx="2468880" cy="1143000"/>
+            <a:off x="9037015" y="457200"/>
+            <a:ext cx="2606040" cy="1188720"/>
           </a:xfrm>
           <a:prstGeom prst="roundRect">
             <a:avLst>
@@ -5654,8 +5654,8 @@
         </p:blipFill>
         <p:spPr>
           <a:xfrm>
-            <a:off x="9357055" y="566928"/>
-            <a:ext cx="2360722" cy="914400"/>
+            <a:off x="9218692" y="617220"/>
+            <a:ext cx="2242686" cy="868680"/>
           </a:xfrm>
           <a:prstGeom prst="rect">
             <a:avLst/>
@@ -7237,8 +7237,8 @@
         </p:nvSpPr>
         <p:spPr>
           <a:xfrm>
-            <a:off x="9174175" y="457200"/>
-            <a:ext cx="2468880" cy="1143000"/>
+            <a:off x="9037015" y="457200"/>
+            <a:ext cx="2606040" cy="1188720"/>
           </a:xfrm>
           <a:prstGeom prst="roundRect">
             <a:avLst>
@@ -7291,8 +7291,8 @@
         </p:blipFill>
         <p:spPr>
           <a:xfrm>
-            <a:off x="9357055" y="566928"/>
-            <a:ext cx="2360722" cy="914400"/>
+            <a:off x="9218692" y="617220"/>
+            <a:ext cx="2242686" cy="868680"/>
           </a:xfrm>
           <a:prstGeom prst="rect">
             <a:avLst/>
@@ -10004,8 +10004,8 @@
         </p:nvSpPr>
         <p:spPr>
           <a:xfrm>
-            <a:off x="9174175" y="457200"/>
-            <a:ext cx="2468880" cy="1143000"/>
+            <a:off x="9037015" y="457200"/>
+            <a:ext cx="2606040" cy="1188720"/>
           </a:xfrm>
           <a:prstGeom prst="roundRect">
             <a:avLst>
@@ -10058,8 +10058,8 @@
         </p:blipFill>
         <p:spPr>
           <a:xfrm>
-            <a:off x="9357055" y="566928"/>
-            <a:ext cx="2360722" cy="914400"/>
+            <a:off x="9218692" y="617220"/>
+            <a:ext cx="2242686" cy="868680"/>
           </a:xfrm>
           <a:prstGeom prst="rect">
             <a:avLst/>
@@ -15172,8 +15172,8 @@
         </p:nvSpPr>
         <p:spPr>
           <a:xfrm>
-            <a:off x="9174175" y="457200"/>
-            <a:ext cx="2468880" cy="1143000"/>
+            <a:off x="9037015" y="457200"/>
+            <a:ext cx="2606040" cy="1188720"/>
           </a:xfrm>
           <a:prstGeom prst="roundRect">
             <a:avLst>
@@ -15226,8 +15226,8 @@
         </p:blipFill>
         <p:spPr>
           <a:xfrm>
-            <a:off x="9357055" y="566928"/>
-            <a:ext cx="2360722" cy="914400"/>
+            <a:off x="9218692" y="617220"/>
+            <a:ext cx="2242686" cy="868680"/>
           </a:xfrm>
           <a:prstGeom prst="rect">
             <a:avLst/>
@@ -19069,8 +19069,8 @@
         </p:nvSpPr>
         <p:spPr>
           <a:xfrm>
-            <a:off x="9174175" y="457200"/>
-            <a:ext cx="2468880" cy="1143000"/>
+            <a:off x="9037015" y="457200"/>
+            <a:ext cx="2606040" cy="1188720"/>
           </a:xfrm>
           <a:prstGeom prst="roundRect">
             <a:avLst>
@@ -19123,8 +19123,8 @@
         </p:blipFill>
         <p:spPr>
           <a:xfrm>
-            <a:off x="9357055" y="566928"/>
-            <a:ext cx="2360722" cy="914400"/>
+            <a:off x="9218692" y="617220"/>
+            <a:ext cx="2242686" cy="868680"/>
           </a:xfrm>
           <a:prstGeom prst="rect">
             <a:avLst/>
